--- a/3-Master_Plan/re_entry/HEROs_and_PASSes/tenure_sandbox/basic_data_plots/TENURE_BDP_slides_AUTO.pptx
+++ b/3-Master_Plan/re_entry/HEROs_and_PASSes/tenure_sandbox/basic_data_plots/TENURE_BDP_slides_AUTO.pptx
@@ -10,6 +10,10 @@
     <p:sldId id="258" r:id="rId9"/>
     <p:sldId id="259" r:id="rId10"/>
     <p:sldId id="260" r:id="rId11"/>
+    <p:sldId id="261" r:id="rId12"/>
+    <p:sldId id="262" r:id="rId13"/>
+    <p:sldId id="263" r:id="rId14"/>
+    <p:sldId id="264" r:id="rId15"/>
   </p:sldIdLst>
   <p:sldSz cx="12191695" cy="6858000" type="screen4x3"/>
   <p:notesSz cx="6858000" cy="9144000"/>
@@ -3420,7 +3424,7 @@
               <a:defRPr sz="1000"/>
             </a:pPr>
             <a:r>
-              <a:t>uni-years=283 · asst-years=2,396 · max coverage=245 · H_sort=0.173</a:t>
+              <a:t>uni-year pools=283 · asst-years=2,396 · max coverage=245 · H_sort=0.173</a:t>
             </a:r>
           </a:p>
         </p:txBody>
@@ -3469,7 +3473,7 @@
               <a:defRPr b="1" sz="2000"/>
             </a:pPr>
             <a:r>
-              <a:t>Slide 2 — poolq_LOO distribution (HERO grain)</a:t>
+              <a:t>Slide 2 — Uni-year peer pool interval overlap (pubs &gt; 0)</a:t>
             </a:r>
           </a:p>
           <a:p>
@@ -3477,7 +3481,7 @@
               <a:defRPr sz="1200" i="1"/>
             </a:pPr>
             <a:r>
-              <a:t>Person-level mean · N≈796 matches Q16/Q20 HERO</a:t>
+              <a:t>Sensitivity — intensive margin only · compare to prior slide</a:t>
             </a:r>
           </a:p>
         </p:txBody>
@@ -3511,7 +3515,7 @@
               <a:defRPr sz="1100"/>
             </a:pPr>
             <a:r>
-              <a:t>• Same collapse as tenure_pass_a_hero: mean poolq_loo_mean over assistant years.</a:t>
+              <a:t>• Same pool unit; assistant-years with pubs_year = 0 dropped before z and intervals.</a:t>
             </a:r>
           </a:p>
           <a:p>
@@ -3522,14 +3526,25 @@
               <a:defRPr sz="1100"/>
             </a:pPr>
             <a:r>
-              <a:t>• Right-skew drives equal-width bin sparsity at high LOO.</a:t>
+              <a:t>• z within year recomputed on pubs &gt; 0 rows only (not identical to full-panel z).</a:t>
+            </a:r>
+          </a:p>
+          <a:p>
+            <a:pPr>
+              <a:spcAft>
+                <a:spcPts val="200"/>
+              </a:spcAft>
+              <a:defRPr sz="1100"/>
+            </a:pPr>
+            <a:r>
+              <a:t>• Compare H_sort and coverage to full-panel slide — zeros inflate overlap mass at bottom.</a:t>
             </a:r>
           </a:p>
         </p:txBody>
       </p:sp>
       <p:pic>
         <p:nvPicPr>
-          <p:cNvPr id="4" name="Picture 3" descr="TENURE_poolq_loo_distribution_infHM.png"/>
+          <p:cNvPr id="4" name="Picture 3" descr="TENURE_pool_interval_overlap_infHM_pubs_gt0.png"/>
           <p:cNvPicPr>
             <a:picLocks noChangeAspect="1"/>
           </p:cNvPicPr>
@@ -3543,8 +3558,8 @@
         </p:blipFill>
         <p:spPr>
           <a:xfrm>
-            <a:off x="2971490" y="1545336"/>
-            <a:ext cx="6248715" cy="3877056"/>
+            <a:off x="3588034" y="1545336"/>
+            <a:ext cx="5015626" cy="3877056"/>
           </a:xfrm>
           <a:prstGeom prst="rect">
             <a:avLst/>
@@ -3579,7 +3594,7 @@
               </a:defRPr>
             </a:pPr>
             <a:r>
-              <a:t>python tenure/scripts/tenure_basic_plots.py --only poolq_loo</a:t>
+              <a:t>python tenure/scripts/tenure_basic_plots.py --only overlap_gt0</a:t>
             </a:r>
           </a:p>
         </p:txBody>
@@ -3610,7 +3625,7 @@
               <a:defRPr sz="1000"/>
             </a:pPr>
             <a:r>
-              <a:t>n=796 · median=3.35 · mean=4.24 · sd=3.16</a:t>
+              <a:t>uni-year pools=263 · asst-years=1,544 · max coverage=208 · H_sort=0.204</a:t>
             </a:r>
           </a:p>
         </p:txBody>
@@ -3659,7 +3674,7 @@
               <a:defRPr b="1" sz="2000"/>
             </a:pPr>
             <a:r>
-              <a:t>Slide 3 — Own pubs_year distribution</a:t>
+              <a:t>Slide 3 — poolq_LOO distribution (HERO grain)</a:t>
             </a:r>
           </a:p>
           <a:p>
@@ -3667,7 +3682,7 @@
               <a:defRPr sz="1200" i="1"/>
             </a:pPr>
             <a:r>
-              <a:t>Assistant person-years · inference panel</a:t>
+              <a:t>Person-level mean · N≈796 matches Q16/Q20 HERO</a:t>
             </a:r>
           </a:p>
         </p:txBody>
@@ -3701,7 +3716,7 @@
               <a:defRPr sz="1100"/>
             </a:pPr>
             <a:r>
-              <a:t>• Own annual publications (OpenAlex) on assistant rows in inference slice.</a:t>
+              <a:t>• Same collapse as tenure_pass_a_hero: mean poolq_loo_mean over assistant years.</a:t>
             </a:r>
           </a:p>
           <a:p>
@@ -3712,14 +3727,14 @@
               <a:defRPr sz="1100"/>
             </a:pPr>
             <a:r>
-              <a:t>• Companion to poolq_LOO — separates individual output from peer context.</a:t>
+              <a:t>• Right-skew drives equal-width bin sparsity at high LOO.</a:t>
             </a:r>
           </a:p>
         </p:txBody>
       </p:sp>
       <p:pic>
         <p:nvPicPr>
-          <p:cNvPr id="4" name="Picture 3" descr="TENURE_pubs_year_distribution_infHM.png"/>
+          <p:cNvPr id="4" name="Picture 3" descr="TENURE_poolq_loo_distribution_infHM.png"/>
           <p:cNvPicPr>
             <a:picLocks noChangeAspect="1"/>
           </p:cNvPicPr>
@@ -3769,7 +3784,7 @@
               </a:defRPr>
             </a:pPr>
             <a:r>
-              <a:t>python tenure/scripts/tenure_basic_plots.py --only pubs_year</a:t>
+              <a:t>python tenure/scripts/tenure_basic_plots.py --only poolq_loo</a:t>
             </a:r>
           </a:p>
         </p:txBody>
@@ -3800,7 +3815,7 @@
               <a:defRPr sz="1000"/>
             </a:pPr>
             <a:r>
-              <a:t>n=2,396 · median=3.00 · mean=6.27 · sd=11.66</a:t>
+              <a:t>n=796 · median=3.35 · mean=4.24 · sd=3.16</a:t>
             </a:r>
           </a:p>
         </p:txBody>
@@ -3849,7 +3864,208 @@
               <a:defRPr b="1" sz="2000"/>
             </a:pPr>
             <a:r>
-              <a:t>Slide 4 — LOO peer pool size distribution</a:t>
+              <a:t>Slide 4 — Own pubs_year distribution</a:t>
+            </a:r>
+          </a:p>
+          <a:p>
+            <a:pPr>
+              <a:defRPr sz="1200" i="1"/>
+            </a:pPr>
+            <a:r>
+              <a:t>Unconditional + inset (pubs &gt; 0) · inference panel</a:t>
+            </a:r>
+          </a:p>
+        </p:txBody>
+      </p:sp>
+      <p:sp>
+        <p:nvSpPr>
+          <p:cNvPr id="3" name="TextBox 2"/>
+          <p:cNvSpPr txBox="1"/>
+          <p:nvPr/>
+        </p:nvSpPr>
+        <p:spPr>
+          <a:xfrm>
+            <a:off x="411480" y="777240"/>
+            <a:ext cx="11368735" cy="713232"/>
+          </a:xfrm>
+          <a:prstGeom prst="rect">
+            <a:avLst/>
+          </a:prstGeom>
+          <a:noFill/>
+        </p:spPr>
+        <p:txBody>
+          <a:bodyPr wrap="square">
+            <a:spAutoFit/>
+          </a:bodyPr>
+          <a:lstStyle/>
+          <a:p>
+            <a:pPr>
+              <a:spcAft>
+                <a:spcPts val="200"/>
+              </a:spcAft>
+              <a:defRPr sz="1100"/>
+            </a:pPr>
+            <a:r>
+              <a:t>• Main: all assistant-years (36% zero pub years in OpenAlex count).</a:t>
+            </a:r>
+          </a:p>
+          <a:p>
+            <a:pPr>
+              <a:spcAft>
+                <a:spcPts val="200"/>
+              </a:spcAft>
+              <a:defRPr sz="1100"/>
+            </a:pPr>
+            <a:r>
+              <a:t>• Inset: intensive margin — shape among those with ≥1 pub (N≈1,544).</a:t>
+            </a:r>
+          </a:p>
+          <a:p>
+            <a:pPr>
+              <a:spcAft>
+                <a:spcPts val="200"/>
+              </a:spcAft>
+              <a:defRPr sz="1100"/>
+            </a:pPr>
+            <a:r>
+              <a:t>• Main x-axis capped near p99; tail max=237 noted in legend box.</a:t>
+            </a:r>
+          </a:p>
+        </p:txBody>
+      </p:sp>
+      <p:pic>
+        <p:nvPicPr>
+          <p:cNvPr id="4" name="Picture 3" descr="TENURE_pubs_year_distribution_infHM.png"/>
+          <p:cNvPicPr>
+            <a:picLocks noChangeAspect="1"/>
+          </p:cNvPicPr>
+          <p:nvPr/>
+        </p:nvPicPr>
+        <p:blipFill>
+          <a:blip r:embed="rId2"/>
+          <a:stretch>
+            <a:fillRect/>
+          </a:stretch>
+        </p:blipFill>
+        <p:spPr>
+          <a:xfrm>
+            <a:off x="2932854" y="1545336"/>
+            <a:ext cx="6325987" cy="3877056"/>
+          </a:xfrm>
+          <a:prstGeom prst="rect">
+            <a:avLst/>
+          </a:prstGeom>
+        </p:spPr>
+      </p:pic>
+      <p:sp>
+        <p:nvSpPr>
+          <p:cNvPr id="5" name="TextBox 4"/>
+          <p:cNvSpPr txBox="1"/>
+          <p:nvPr/>
+        </p:nvSpPr>
+        <p:spPr>
+          <a:xfrm>
+            <a:off x="411480" y="5495544"/>
+            <a:ext cx="11368735" cy="502920"/>
+          </a:xfrm>
+          <a:prstGeom prst="rect">
+            <a:avLst/>
+          </a:prstGeom>
+          <a:noFill/>
+        </p:spPr>
+        <p:txBody>
+          <a:bodyPr wrap="square" anchor="t">
+            <a:spAutoFit/>
+          </a:bodyPr>
+          <a:lstStyle/>
+          <a:p>
+            <a:pPr algn="l">
+              <a:defRPr sz="800">
+                <a:latin typeface="Menlo"/>
+              </a:defRPr>
+            </a:pPr>
+            <a:r>
+              <a:t>python tenure/scripts/tenure_basic_plots.py --only pubs_year</a:t>
+            </a:r>
+          </a:p>
+        </p:txBody>
+      </p:sp>
+      <p:sp>
+        <p:nvSpPr>
+          <p:cNvPr id="6" name="TextBox 5"/>
+          <p:cNvSpPr txBox="1"/>
+          <p:nvPr/>
+        </p:nvSpPr>
+        <p:spPr>
+          <a:xfrm>
+            <a:off x="411480" y="6035040"/>
+            <a:ext cx="11368735" cy="384048"/>
+          </a:xfrm>
+          <a:prstGeom prst="rect">
+            <a:avLst/>
+          </a:prstGeom>
+          <a:noFill/>
+        </p:spPr>
+        <p:txBody>
+          <a:bodyPr wrap="square">
+            <a:spAutoFit/>
+          </a:bodyPr>
+          <a:lstStyle/>
+          <a:p>
+            <a:pPr>
+              <a:defRPr sz="1000"/>
+            </a:pPr>
+            <a:r>
+              <a:t>all n=2,396 (36% zero) · inset n=1,544 · med=7.0 · mean=9.7</a:t>
+            </a:r>
+          </a:p>
+        </p:txBody>
+      </p:sp>
+    </p:spTree>
+  </p:cSld>
+  <p:clrMapOvr>
+    <a:masterClrMapping/>
+  </p:clrMapOvr>
+</p:sld>
+</file>
+
+<file path=ppt/slides/slide6.xml><?xml version="1.0" encoding="utf-8"?>
+<p:sld xmlns:a="http://schemas.openxmlformats.org/drawingml/2006/main" xmlns:p="http://schemas.openxmlformats.org/presentationml/2006/main" xmlns:r="http://schemas.openxmlformats.org/officeDocument/2006/relationships">
+  <p:cSld>
+    <p:spTree>
+      <p:nvGrpSpPr>
+        <p:cNvPr id="1" name=""/>
+        <p:cNvGrpSpPr/>
+        <p:nvPr/>
+      </p:nvGrpSpPr>
+      <p:grpSpPr/>
+      <p:sp>
+        <p:nvSpPr>
+          <p:cNvPr id="2" name="TextBox 1"/>
+          <p:cNvSpPr txBox="1"/>
+          <p:nvPr/>
+        </p:nvSpPr>
+        <p:spPr>
+          <a:xfrm>
+            <a:off x="411480" y="201168"/>
+            <a:ext cx="11368735" cy="502920"/>
+          </a:xfrm>
+          <a:prstGeom prst="rect">
+            <a:avLst/>
+          </a:prstGeom>
+          <a:noFill/>
+        </p:spPr>
+        <p:txBody>
+          <a:bodyPr wrap="square">
+            <a:spAutoFit/>
+          </a:bodyPr>
+          <a:lstStyle/>
+          <a:p>
+            <a:pPr>
+              <a:defRPr b="1" sz="2000"/>
+            </a:pPr>
+            <a:r>
+              <a:t>Slide 5 — LOO peer pool size distribution</a:t>
             </a:r>
           </a:p>
           <a:p>
@@ -3991,6 +4207,609 @@
             </a:pPr>
             <a:r>
               <a:t>n=2,396 · median=15.00 · mean=17.22 · sd=10.32</a:t>
+            </a:r>
+          </a:p>
+        </p:txBody>
+      </p:sp>
+    </p:spTree>
+  </p:cSld>
+  <p:clrMapOvr>
+    <a:masterClrMapping/>
+  </p:clrMapOvr>
+</p:sld>
+</file>
+
+<file path=ppt/slides/slide7.xml><?xml version="1.0" encoding="utf-8"?>
+<p:sld xmlns:a="http://schemas.openxmlformats.org/drawingml/2006/main" xmlns:p="http://schemas.openxmlformats.org/presentationml/2006/main" xmlns:r="http://schemas.openxmlformats.org/officeDocument/2006/relationships">
+  <p:cSld>
+    <p:spTree>
+      <p:nvGrpSpPr>
+        <p:cNvPr id="1" name=""/>
+        <p:cNvGrpSpPr/>
+        <p:nvPr/>
+      </p:nvGrpSpPr>
+      <p:grpSpPr/>
+      <p:sp>
+        <p:nvSpPr>
+          <p:cNvPr id="2" name="TextBox 1"/>
+          <p:cNvSpPr txBox="1"/>
+          <p:nvPr/>
+        </p:nvSpPr>
+        <p:spPr>
+          <a:xfrm>
+            <a:off x="411480" y="201168"/>
+            <a:ext cx="11368735" cy="502920"/>
+          </a:xfrm>
+          <a:prstGeom prst="rect">
+            <a:avLst/>
+          </a:prstGeom>
+          <a:noFill/>
+        </p:spPr>
+        <p:txBody>
+          <a:bodyPr wrap="square">
+            <a:spAutoFit/>
+          </a:bodyPr>
+          <a:lstStyle/>
+          <a:p>
+            <a:pPr>
+              <a:defRPr b="1" sz="2000"/>
+            </a:pPr>
+            <a:r>
+              <a:t>Slide 6 — Own pubs by outcome (person-level)</a:t>
+            </a:r>
+          </a:p>
+          <a:p>
+            <a:pPr>
+              <a:defRPr sz="1200" i="1"/>
+            </a:pPr>
+            <a:r>
+              <a:t>Tenured vs attrition vs censored · same HERO N</a:t>
+            </a:r>
+          </a:p>
+        </p:txBody>
+      </p:sp>
+      <p:sp>
+        <p:nvSpPr>
+          <p:cNvPr id="3" name="TextBox 2"/>
+          <p:cNvSpPr txBox="1"/>
+          <p:nvPr/>
+        </p:nvSpPr>
+        <p:spPr>
+          <a:xfrm>
+            <a:off x="411480" y="777240"/>
+            <a:ext cx="11368735" cy="713232"/>
+          </a:xfrm>
+          <a:prstGeom prst="rect">
+            <a:avLst/>
+          </a:prstGeom>
+          <a:noFill/>
+        </p:spPr>
+        <p:txBody>
+          <a:bodyPr wrap="square">
+            <a:spAutoFit/>
+          </a:bodyPr>
+          <a:lstStyle/>
+          <a:p>
+            <a:pPr>
+              <a:spcAft>
+                <a:spcPts val="200"/>
+              </a:spcAft>
+              <a:defRPr sz="1100"/>
+            </a:pPr>
+            <a:r>
+              <a:t>• Person-level mean pubs_year over assistant spell — descriptive, not HERO.</a:t>
+            </a:r>
+          </a:p>
+          <a:p>
+            <a:pPr>
+              <a:spcAft>
+                <a:spcPts val="200"/>
+              </a:spcAft>
+              <a:defRPr sz="1100"/>
+            </a:pPr>
+            <a:r>
+              <a:t>• Blue = promoted (tenure_event); orange = left as assistant; gray = still asst ≈ 2024.</a:t>
+            </a:r>
+          </a:p>
+          <a:p>
+            <a:pPr>
+              <a:spcAft>
+                <a:spcPts val="200"/>
+              </a:spcAft>
+              <a:defRPr sz="1100"/>
+            </a:pPr>
+            <a:r>
+              <a:t>• Compares own output to the LOO environment HERO bins on.</a:t>
+            </a:r>
+          </a:p>
+        </p:txBody>
+      </p:sp>
+      <p:pic>
+        <p:nvPicPr>
+          <p:cNvPr id="4" name="Picture 3" descr="TENURE_pubs_mean_by_outcome_infHM.png"/>
+          <p:cNvPicPr>
+            <a:picLocks noChangeAspect="1"/>
+          </p:cNvPicPr>
+          <p:nvPr/>
+        </p:nvPicPr>
+        <p:blipFill>
+          <a:blip r:embed="rId2"/>
+          <a:stretch>
+            <a:fillRect/>
+          </a:stretch>
+        </p:blipFill>
+        <p:spPr>
+          <a:xfrm>
+            <a:off x="2935368" y="1545336"/>
+            <a:ext cx="6320958" cy="3877056"/>
+          </a:xfrm>
+          <a:prstGeom prst="rect">
+            <a:avLst/>
+          </a:prstGeom>
+        </p:spPr>
+      </p:pic>
+      <p:sp>
+        <p:nvSpPr>
+          <p:cNvPr id="5" name="TextBox 4"/>
+          <p:cNvSpPr txBox="1"/>
+          <p:nvPr/>
+        </p:nvSpPr>
+        <p:spPr>
+          <a:xfrm>
+            <a:off x="411480" y="5495544"/>
+            <a:ext cx="11368735" cy="502920"/>
+          </a:xfrm>
+          <a:prstGeom prst="rect">
+            <a:avLst/>
+          </a:prstGeom>
+          <a:noFill/>
+        </p:spPr>
+        <p:txBody>
+          <a:bodyPr wrap="square" anchor="t">
+            <a:spAutoFit/>
+          </a:bodyPr>
+          <a:lstStyle/>
+          <a:p>
+            <a:pPr algn="l">
+              <a:defRPr sz="800">
+                <a:latin typeface="Menlo"/>
+              </a:defRPr>
+            </a:pPr>
+            <a:r>
+              <a:t>python tenure/scripts/tenure_basic_plots.py --only pubs_by_outcome</a:t>
+            </a:r>
+          </a:p>
+        </p:txBody>
+      </p:sp>
+      <p:sp>
+        <p:nvSpPr>
+          <p:cNvPr id="6" name="TextBox 5"/>
+          <p:cNvSpPr txBox="1"/>
+          <p:nvPr/>
+        </p:nvSpPr>
+        <p:spPr>
+          <a:xfrm>
+            <a:off x="411480" y="6035040"/>
+            <a:ext cx="11368735" cy="384048"/>
+          </a:xfrm>
+          <a:prstGeom prst="rect">
+            <a:avLst/>
+          </a:prstGeom>
+          <a:noFill/>
+        </p:spPr>
+        <p:txBody>
+          <a:bodyPr wrap="square">
+            <a:spAutoFit/>
+          </a:bodyPr>
+          <a:lstStyle/>
+          <a:p>
+            <a:pPr>
+              <a:defRPr sz="1000"/>
+            </a:pPr>
+            <a:r>
+              <a:t>tenured n=174 med=6.2 · attrition n=202 med=3.0 · censored n=420 med=2.0</a:t>
+            </a:r>
+          </a:p>
+        </p:txBody>
+      </p:sp>
+    </p:spTree>
+  </p:cSld>
+  <p:clrMapOvr>
+    <a:masterClrMapping/>
+  </p:clrMapOvr>
+</p:sld>
+</file>
+
+<file path=ppt/slides/slide8.xml><?xml version="1.0" encoding="utf-8"?>
+<p:sld xmlns:a="http://schemas.openxmlformats.org/drawingml/2006/main" xmlns:p="http://schemas.openxmlformats.org/presentationml/2006/main" xmlns:r="http://schemas.openxmlformats.org/officeDocument/2006/relationships">
+  <p:cSld>
+    <p:spTree>
+      <p:nvGrpSpPr>
+        <p:cNvPr id="1" name=""/>
+        <p:cNvGrpSpPr/>
+        <p:nvPr/>
+      </p:nvGrpSpPr>
+      <p:grpSpPr/>
+      <p:sp>
+        <p:nvSpPr>
+          <p:cNvPr id="2" name="TextBox 1"/>
+          <p:cNvSpPr txBox="1"/>
+          <p:nvPr/>
+        </p:nvSpPr>
+        <p:spPr>
+          <a:xfrm>
+            <a:off x="411480" y="201168"/>
+            <a:ext cx="11368735" cy="502920"/>
+          </a:xfrm>
+          <a:prstGeom prst="rect">
+            <a:avLst/>
+          </a:prstGeom>
+          <a:noFill/>
+        </p:spPr>
+        <p:txBody>
+          <a:bodyPr wrap="square">
+            <a:spAutoFit/>
+          </a:bodyPr>
+          <a:lstStyle/>
+          <a:p>
+            <a:pPr>
+              <a:defRPr b="1" sz="2000"/>
+            </a:pPr>
+            <a:r>
+              <a:t>Slide 7 — Promoted instructors — own pubs</a:t>
+            </a:r>
+          </a:p>
+          <a:p>
+            <a:pPr>
+              <a:defRPr sz="1200" i="1"/>
+            </a:pPr>
+            <a:r>
+              <a:t>Tenured only · person-level mean + inset (mean &gt; 0)</a:t>
+            </a:r>
+          </a:p>
+        </p:txBody>
+      </p:sp>
+      <p:sp>
+        <p:nvSpPr>
+          <p:cNvPr id="3" name="TextBox 2"/>
+          <p:cNvSpPr txBox="1"/>
+          <p:nvPr/>
+        </p:nvSpPr>
+        <p:spPr>
+          <a:xfrm>
+            <a:off x="411480" y="777240"/>
+            <a:ext cx="11368735" cy="713232"/>
+          </a:xfrm>
+          <a:prstGeom prst="rect">
+            <a:avLst/>
+          </a:prstGeom>
+          <a:noFill/>
+        </p:spPr>
+        <p:txBody>
+          <a:bodyPr wrap="square">
+            <a:spAutoFit/>
+          </a:bodyPr>
+          <a:lstStyle/>
+          <a:p>
+            <a:pPr>
+              <a:spcAft>
+                <a:spcPts val="200"/>
+              </a:spcAft>
+              <a:defRPr sz="1100"/>
+            </a:pPr>
+            <a:r>
+              <a:t>• Subset to tenure_event = True (N≈174 on inference panel).</a:t>
+            </a:r>
+          </a:p>
+          <a:p>
+            <a:pPr>
+              <a:spcAft>
+                <a:spcPts val="200"/>
+              </a:spcAft>
+              <a:defRPr sz="1100"/>
+            </a:pPr>
+            <a:r>
+              <a:t>• Mean annual pubs over assistant years — not cumulative career total.</a:t>
+            </a:r>
+          </a:p>
+          <a:p>
+            <a:pPr>
+              <a:spcAft>
+                <a:spcPts val="200"/>
+              </a:spcAft>
+              <a:defRPr sz="1100"/>
+            </a:pPr>
+            <a:r>
+              <a:t>• Pairs with HERO high-bin tenure rates; inset drops zero-mean spells.</a:t>
+            </a:r>
+          </a:p>
+        </p:txBody>
+      </p:sp>
+      <p:pic>
+        <p:nvPicPr>
+          <p:cNvPr id="4" name="Picture 3" descr="TENURE_pubs_mean_tenured_infHM.png"/>
+          <p:cNvPicPr>
+            <a:picLocks noChangeAspect="1"/>
+          </p:cNvPicPr>
+          <p:nvPr/>
+        </p:nvPicPr>
+        <p:blipFill>
+          <a:blip r:embed="rId2"/>
+          <a:stretch>
+            <a:fillRect/>
+          </a:stretch>
+        </p:blipFill>
+        <p:spPr>
+          <a:xfrm>
+            <a:off x="2932854" y="1545336"/>
+            <a:ext cx="6325987" cy="3877056"/>
+          </a:xfrm>
+          <a:prstGeom prst="rect">
+            <a:avLst/>
+          </a:prstGeom>
+        </p:spPr>
+      </p:pic>
+      <p:sp>
+        <p:nvSpPr>
+          <p:cNvPr id="5" name="TextBox 4"/>
+          <p:cNvSpPr txBox="1"/>
+          <p:nvPr/>
+        </p:nvSpPr>
+        <p:spPr>
+          <a:xfrm>
+            <a:off x="411480" y="5495544"/>
+            <a:ext cx="11368735" cy="502920"/>
+          </a:xfrm>
+          <a:prstGeom prst="rect">
+            <a:avLst/>
+          </a:prstGeom>
+          <a:noFill/>
+        </p:spPr>
+        <p:txBody>
+          <a:bodyPr wrap="square" anchor="t">
+            <a:spAutoFit/>
+          </a:bodyPr>
+          <a:lstStyle/>
+          <a:p>
+            <a:pPr algn="l">
+              <a:defRPr sz="800">
+                <a:latin typeface="Menlo"/>
+              </a:defRPr>
+            </a:pPr>
+            <a:r>
+              <a:t>python tenure/scripts/tenure_basic_plots.py --only pubs_tenured</a:t>
+            </a:r>
+          </a:p>
+        </p:txBody>
+      </p:sp>
+      <p:sp>
+        <p:nvSpPr>
+          <p:cNvPr id="6" name="TextBox 5"/>
+          <p:cNvSpPr txBox="1"/>
+          <p:nvPr/>
+        </p:nvSpPr>
+        <p:spPr>
+          <a:xfrm>
+            <a:off x="411480" y="6035040"/>
+            <a:ext cx="11368735" cy="384048"/>
+          </a:xfrm>
+          <a:prstGeom prst="rect">
+            <a:avLst/>
+          </a:prstGeom>
+          <a:noFill/>
+        </p:spPr>
+        <p:txBody>
+          <a:bodyPr wrap="square">
+            <a:spAutoFit/>
+          </a:bodyPr>
+          <a:lstStyle/>
+          <a:p>
+            <a:pPr>
+              <a:defRPr sz="1000"/>
+            </a:pPr>
+            <a:r>
+              <a:t>tenured n=174 · med=6.2 · mean=7.7 · inset n=133</a:t>
+            </a:r>
+          </a:p>
+        </p:txBody>
+      </p:sp>
+    </p:spTree>
+  </p:cSld>
+  <p:clrMapOvr>
+    <a:masterClrMapping/>
+  </p:clrMapOvr>
+</p:sld>
+</file>
+
+<file path=ppt/slides/slide9.xml><?xml version="1.0" encoding="utf-8"?>
+<p:sld xmlns:a="http://schemas.openxmlformats.org/drawingml/2006/main" xmlns:p="http://schemas.openxmlformats.org/presentationml/2006/main" xmlns:r="http://schemas.openxmlformats.org/officeDocument/2006/relationships">
+  <p:cSld>
+    <p:spTree>
+      <p:nvGrpSpPr>
+        <p:cNvPr id="1" name=""/>
+        <p:cNvGrpSpPr/>
+        <p:nvPr/>
+      </p:nvGrpSpPr>
+      <p:grpSpPr/>
+      <p:sp>
+        <p:nvSpPr>
+          <p:cNvPr id="2" name="TextBox 1"/>
+          <p:cNvSpPr txBox="1"/>
+          <p:nvPr/>
+        </p:nvSpPr>
+        <p:spPr>
+          <a:xfrm>
+            <a:off x="411480" y="201168"/>
+            <a:ext cx="11368735" cy="502920"/>
+          </a:xfrm>
+          <a:prstGeom prst="rect">
+            <a:avLst/>
+          </a:prstGeom>
+          <a:noFill/>
+        </p:spPr>
+        <p:txBody>
+          <a:bodyPr wrap="square">
+            <a:spAutoFit/>
+          </a:bodyPr>
+          <a:lstStyle/>
+          <a:p>
+            <a:pPr>
+              <a:defRPr b="1" sz="2000"/>
+            </a:pPr>
+            <a:r>
+              <a:t>Slide 8 — poolq_LOO by outcome (person-level)</a:t>
+            </a:r>
+          </a:p>
+          <a:p>
+            <a:pPr>
+              <a:defRPr sz="1200" i="1"/>
+            </a:pPr>
+            <a:r>
+              <a:t>Peer environment split · complements HERO x-axis</a:t>
+            </a:r>
+          </a:p>
+        </p:txBody>
+      </p:sp>
+      <p:sp>
+        <p:nvSpPr>
+          <p:cNvPr id="3" name="TextBox 2"/>
+          <p:cNvSpPr txBox="1"/>
+          <p:nvPr/>
+        </p:nvSpPr>
+        <p:spPr>
+          <a:xfrm>
+            <a:off x="411480" y="777240"/>
+            <a:ext cx="11368735" cy="713232"/>
+          </a:xfrm>
+          <a:prstGeom prst="rect">
+            <a:avLst/>
+          </a:prstGeom>
+          <a:noFill/>
+        </p:spPr>
+        <p:txBody>
+          <a:bodyPr wrap="square">
+            <a:spAutoFit/>
+          </a:bodyPr>
+          <a:lstStyle/>
+          <a:p>
+            <a:pPr>
+              <a:spcAft>
+                <a:spcPts val="200"/>
+              </a:spcAft>
+              <a:defRPr sz="1100"/>
+            </a:pPr>
+            <a:r>
+              <a:t>• Same outcome colors as pubs-by-outcome slide.</a:t>
+            </a:r>
+          </a:p>
+          <a:p>
+            <a:pPr>
+              <a:spcAft>
+                <a:spcPts val="200"/>
+              </a:spcAft>
+              <a:defRPr sz="1100"/>
+            </a:pPr>
+            <a:r>
+              <a:t>• Shows whether promoted faculty carried higher LOO peer pressure on average.</a:t>
+            </a:r>
+          </a:p>
+          <a:p>
+            <a:pPr>
+              <a:spcAft>
+                <a:spcPts val="200"/>
+              </a:spcAft>
+              <a:defRPr sz="1100"/>
+            </a:pPr>
+            <a:r>
+              <a:t>• HERO asks rate(T|LOO bin); this is marginal LOO by outcome.</a:t>
+            </a:r>
+          </a:p>
+        </p:txBody>
+      </p:sp>
+      <p:pic>
+        <p:nvPicPr>
+          <p:cNvPr id="4" name="Picture 3" descr="TENURE_poolq_loo_by_outcome_infHM.png"/>
+          <p:cNvPicPr>
+            <a:picLocks noChangeAspect="1"/>
+          </p:cNvPicPr>
+          <p:nvPr/>
+        </p:nvPicPr>
+        <p:blipFill>
+          <a:blip r:embed="rId2"/>
+          <a:stretch>
+            <a:fillRect/>
+          </a:stretch>
+        </p:blipFill>
+        <p:spPr>
+          <a:xfrm>
+            <a:off x="2930340" y="1545336"/>
+            <a:ext cx="6331015" cy="3877056"/>
+          </a:xfrm>
+          <a:prstGeom prst="rect">
+            <a:avLst/>
+          </a:prstGeom>
+        </p:spPr>
+      </p:pic>
+      <p:sp>
+        <p:nvSpPr>
+          <p:cNvPr id="5" name="TextBox 4"/>
+          <p:cNvSpPr txBox="1"/>
+          <p:nvPr/>
+        </p:nvSpPr>
+        <p:spPr>
+          <a:xfrm>
+            <a:off x="411480" y="5495544"/>
+            <a:ext cx="11368735" cy="502920"/>
+          </a:xfrm>
+          <a:prstGeom prst="rect">
+            <a:avLst/>
+          </a:prstGeom>
+          <a:noFill/>
+        </p:spPr>
+        <p:txBody>
+          <a:bodyPr wrap="square" anchor="t">
+            <a:spAutoFit/>
+          </a:bodyPr>
+          <a:lstStyle/>
+          <a:p>
+            <a:pPr algn="l">
+              <a:defRPr sz="800">
+                <a:latin typeface="Menlo"/>
+              </a:defRPr>
+            </a:pPr>
+            <a:r>
+              <a:t>python tenure/scripts/tenure_basic_plots.py --only loo_by_outcome</a:t>
+            </a:r>
+          </a:p>
+        </p:txBody>
+      </p:sp>
+      <p:sp>
+        <p:nvSpPr>
+          <p:cNvPr id="6" name="TextBox 5"/>
+          <p:cNvSpPr txBox="1"/>
+          <p:nvPr/>
+        </p:nvSpPr>
+        <p:spPr>
+          <a:xfrm>
+            <a:off x="411480" y="6035040"/>
+            <a:ext cx="11368735" cy="384048"/>
+          </a:xfrm>
+          <a:prstGeom prst="rect">
+            <a:avLst/>
+          </a:prstGeom>
+          <a:noFill/>
+        </p:spPr>
+        <p:txBody>
+          <a:bodyPr wrap="square">
+            <a:spAutoFit/>
+          </a:bodyPr>
+          <a:lstStyle/>
+          <a:p>
+            <a:pPr>
+              <a:defRPr sz="1000"/>
+            </a:pPr>
+            <a:r>
+              <a:t>tenured n=174 med=3.8 · attrition n=202 med=3.5 · censored n=420 med=3.2</a:t>
             </a:r>
           </a:p>
         </p:txBody>

--- a/3-Master_Plan/re_entry/HEROs_and_PASSes/tenure_sandbox/basic_data_plots/TENURE_BDP_slides_AUTO.pptx
+++ b/3-Master_Plan/re_entry/HEROs_and_PASSes/tenure_sandbox/basic_data_plots/TENURE_BDP_slides_AUTO.pptx
@@ -14,6 +14,13 @@
     <p:sldId id="262" r:id="rId13"/>
     <p:sldId id="263" r:id="rId14"/>
     <p:sldId id="264" r:id="rId15"/>
+    <p:sldId id="265" r:id="rId16"/>
+    <p:sldId id="266" r:id="rId17"/>
+    <p:sldId id="267" r:id="rId18"/>
+    <p:sldId id="268" r:id="rId19"/>
+    <p:sldId id="269" r:id="rId20"/>
+    <p:sldId id="270" r:id="rId21"/>
+    <p:sldId id="271" r:id="rId22"/>
   </p:sldIdLst>
   <p:sldSz cx="12191695" cy="6858000" type="screen4x3"/>
   <p:notesSz cx="6858000" cy="9144000"/>
@@ -3130,7 +3137,7 @@
               <a:defRPr sz="1200" i="1"/>
             </a:pPr>
             <a:r>
-              <a:t>2026-09-01</a:t>
+              <a:t>2026-09-02</a:t>
             </a:r>
           </a:p>
         </p:txBody>
@@ -3164,7 +3171,7 @@
               <a:defRPr sz="1100"/>
             </a:pPr>
             <a:r>
-              <a:t>• Tenure HERO population: HIGH + MEDIUM OpenAlex inference · LOO computable on assistant rows.</a:t>
+              <a:t>• Tenure porch BDP: HIGH + MEDIUM OpenAlex inference · LOO computable.</a:t>
             </a:r>
           </a:p>
           <a:p>
@@ -3175,7 +3182,7 @@
               <a:defRPr sz="1100"/>
             </a:pPr>
             <a:r>
-              <a:t>• HERO lock: person-level mean poolq_LOO · Q16 quantile (Q20 for dip robustness).</a:t>
+              <a:t>• v0 section: ASST-PS uni×year assistant pools (exploratory lock).</a:t>
             </a:r>
           </a:p>
           <a:p>
@@ -3186,7 +3193,18 @@
               <a:defRPr sz="1100"/>
             </a:pPr>
             <a:r>
-              <a:t>• Rates: tenure among resolved (Option A); censored excluded from denominator.</a:t>
+              <a:t>• PD29 section: decision cohort · asst_time · pubs_per_career_year · dept pond LOO.</a:t>
+            </a:r>
+          </a:p>
+          <a:p>
+            <a:pPr>
+              <a:spcAft>
+                <a:spcPts val="200"/>
+              </a:spcAft>
+              <a:defRPr sz="1100"/>
+            </a:pPr>
+            <a:r>
+              <a:t>• HERO rate plots: TENURE_HERO_slides_AUTO.pptx (decision dept LOO = primary).</a:t>
             </a:r>
           </a:p>
         </p:txBody>
@@ -3224,6 +3242,1292 @@
             <a:br/>
             <a:r>
               <a:t>python tenure/scripts/build_tenure_basic_plots_slides.py</a:t>
+            </a:r>
+          </a:p>
+        </p:txBody>
+      </p:sp>
+    </p:spTree>
+  </p:cSld>
+  <p:clrMapOvr>
+    <a:masterClrMapping/>
+  </p:clrMapOvr>
+</p:sld>
+</file>
+
+<file path=ppt/slides/slide10.xml><?xml version="1.0" encoding="utf-8"?>
+<p:sld xmlns:a="http://schemas.openxmlformats.org/drawingml/2006/main" xmlns:p="http://schemas.openxmlformats.org/presentationml/2006/main" xmlns:r="http://schemas.openxmlformats.org/officeDocument/2006/relationships">
+  <p:cSld>
+    <p:spTree>
+      <p:nvGrpSpPr>
+        <p:cNvPr id="1" name=""/>
+        <p:cNvGrpSpPr/>
+        <p:nvPr/>
+      </p:nvGrpSpPr>
+      <p:grpSpPr/>
+      <p:sp>
+        <p:nvSpPr>
+          <p:cNvPr id="2" name="TextBox 1"/>
+          <p:cNvSpPr txBox="1"/>
+          <p:nvPr/>
+        </p:nvSpPr>
+        <p:spPr>
+          <a:xfrm>
+            <a:off x="411480" y="201168"/>
+            <a:ext cx="11368735" cy="502920"/>
+          </a:xfrm>
+          <a:prstGeom prst="rect">
+            <a:avLst/>
+          </a:prstGeom>
+          <a:noFill/>
+        </p:spPr>
+        <p:txBody>
+          <a:bodyPr wrap="square">
+            <a:spAutoFit/>
+          </a:bodyPr>
+          <a:lstStyle/>
+          <a:p>
+            <a:pPr>
+              <a:defRPr b="1" sz="2000"/>
+            </a:pPr>
+            <a:r>
+              <a:t>Decision cohort — basic data plots (PD29)</a:t>
+            </a:r>
+          </a:p>
+          <a:p>
+            <a:pPr>
+              <a:defRPr sz="1200" i="1"/>
+            </a:pPr>
+            <a:r>
+              <a:t>2026-09-02 · rebuilt panel · new metrics</a:t>
+            </a:r>
+          </a:p>
+        </p:txBody>
+      </p:sp>
+      <p:sp>
+        <p:nvSpPr>
+          <p:cNvPr id="3" name="TextBox 2"/>
+          <p:cNvSpPr txBox="1"/>
+          <p:nvPr/>
+        </p:nvSpPr>
+        <p:spPr>
+          <a:xfrm>
+            <a:off x="411480" y="1005840"/>
+            <a:ext cx="11368735" cy="1234440"/>
+          </a:xfrm>
+          <a:prstGeom prst="rect">
+            <a:avLst/>
+          </a:prstGeom>
+          <a:noFill/>
+        </p:spPr>
+        <p:txBody>
+          <a:bodyPr wrap="square">
+            <a:spAutoFit/>
+          </a:bodyPr>
+          <a:lstStyle/>
+          <a:p>
+            <a:pPr>
+              <a:spcAft>
+                <a:spcPts val="200"/>
+              </a:spcAft>
+              <a:defRPr sz="1100"/>
+            </a:pPr>
+            <a:r>
+              <a:t>• Resolved = tenure or attrition (incl. off_tenure_track). Excl. censored + transferred.</a:t>
+            </a:r>
+          </a:p>
+          <a:p>
+            <a:pPr>
+              <a:spcAft>
+                <a:spcPts val="200"/>
+              </a:spcAft>
+              <a:defRPr sz="1100"/>
+            </a:pPr>
+            <a:r>
+              <a:t>• Metrics: asst_time · own pubs_per_career_year · dept pond LOO (whole dept, you excluded).</a:t>
+            </a:r>
+          </a:p>
+          <a:p>
+            <a:pPr>
+              <a:spcAft>
+                <a:spcPts val="200"/>
+              </a:spcAft>
+              <a:defRPr sz="1100"/>
+            </a:pPr>
+            <a:r>
+              <a:t>• Reference band asst_time 5–6 shaded on timing plot only — not an inclusion filter.</a:t>
+            </a:r>
+          </a:p>
+        </p:txBody>
+      </p:sp>
+    </p:spTree>
+  </p:cSld>
+  <p:clrMapOvr>
+    <a:masterClrMapping/>
+  </p:clrMapOvr>
+</p:sld>
+</file>
+
+<file path=ppt/slides/slide11.xml><?xml version="1.0" encoding="utf-8"?>
+<p:sld xmlns:a="http://schemas.openxmlformats.org/drawingml/2006/main" xmlns:p="http://schemas.openxmlformats.org/presentationml/2006/main" xmlns:r="http://schemas.openxmlformats.org/officeDocument/2006/relationships">
+  <p:cSld>
+    <p:spTree>
+      <p:nvGrpSpPr>
+        <p:cNvPr id="1" name=""/>
+        <p:cNvGrpSpPr/>
+        <p:nvPr/>
+      </p:nvGrpSpPr>
+      <p:grpSpPr/>
+      <p:sp>
+        <p:nvSpPr>
+          <p:cNvPr id="2" name="TextBox 1"/>
+          <p:cNvSpPr txBox="1"/>
+          <p:nvPr/>
+        </p:nvSpPr>
+        <p:spPr>
+          <a:xfrm>
+            <a:off x="411480" y="201168"/>
+            <a:ext cx="11368735" cy="502920"/>
+          </a:xfrm>
+          <a:prstGeom prst="rect">
+            <a:avLst/>
+          </a:prstGeom>
+          <a:noFill/>
+        </p:spPr>
+        <p:txBody>
+          <a:bodyPr wrap="square">
+            <a:spAutoFit/>
+          </a:bodyPr>
+          <a:lstStyle/>
+          <a:p>
+            <a:pPr>
+              <a:defRPr b="1" sz="2000"/>
+            </a:pPr>
+            <a:r>
+              <a:t>Slide 9 — Assistant time at exit (all resolved)</a:t>
+            </a:r>
+          </a:p>
+          <a:p>
+            <a:pPr>
+              <a:defRPr sz="1200" i="1"/>
+            </a:pPr>
+            <a:r>
+              <a:t>exit cross-section · Reference band asst_time 5–6 shaded · not a filter</a:t>
+            </a:r>
+          </a:p>
+        </p:txBody>
+      </p:sp>
+      <p:sp>
+        <p:nvSpPr>
+          <p:cNvPr id="3" name="TextBox 2"/>
+          <p:cNvSpPr txBox="1"/>
+          <p:nvPr/>
+        </p:nvSpPr>
+        <p:spPr>
+          <a:xfrm>
+            <a:off x="411480" y="777240"/>
+            <a:ext cx="11368735" cy="713232"/>
+          </a:xfrm>
+          <a:prstGeom prst="rect">
+            <a:avLst/>
+          </a:prstGeom>
+          <a:noFill/>
+        </p:spPr>
+        <p:txBody>
+          <a:bodyPr wrap="square">
+            <a:spAutoFit/>
+          </a:bodyPr>
+          <a:lstStyle/>
+          <a:p>
+            <a:pPr>
+              <a:spcAft>
+                <a:spcPts val="200"/>
+              </a:spcAft>
+              <a:defRPr sz="1100"/>
+            </a:pPr>
+            <a:r>
+              <a:t>• 391 resolved infHM at last assistant year (excl. transferred).</a:t>
+            </a:r>
+          </a:p>
+          <a:p>
+            <a:pPr>
+              <a:spcAft>
+                <a:spcPts val="200"/>
+              </a:spcAft>
+              <a:defRPr sz="1100"/>
+            </a:pPr>
+            <a:r>
+              <a:t>• Dept-year censoring + off-tenure-track attrition on rebuilt panel.</a:t>
+            </a:r>
+          </a:p>
+          <a:p>
+            <a:pPr>
+              <a:spcAft>
+                <a:spcPts val="200"/>
+              </a:spcAft>
+              <a:defRPr sz="1100"/>
+            </a:pPr>
+            <a:r>
+              <a:t>• Most exits early (asst_time 1–4); band 5–6 = Alex expected clock (63 people, 16%).</a:t>
+            </a:r>
+          </a:p>
+        </p:txBody>
+      </p:sp>
+      <p:pic>
+        <p:nvPicPr>
+          <p:cNvPr id="4" name="Picture 3" descr="TENURE_decision_asst_time_exit_pd29.png"/>
+          <p:cNvPicPr>
+            <a:picLocks noChangeAspect="1"/>
+          </p:cNvPicPr>
+          <p:nvPr/>
+        </p:nvPicPr>
+        <p:blipFill>
+          <a:blip r:embed="rId2"/>
+          <a:stretch>
+            <a:fillRect/>
+          </a:stretch>
+        </p:blipFill>
+        <p:spPr>
+          <a:xfrm>
+            <a:off x="2968849" y="1545336"/>
+            <a:ext cx="6253997" cy="3877056"/>
+          </a:xfrm>
+          <a:prstGeom prst="rect">
+            <a:avLst/>
+          </a:prstGeom>
+        </p:spPr>
+      </p:pic>
+      <p:sp>
+        <p:nvSpPr>
+          <p:cNvPr id="5" name="TextBox 4"/>
+          <p:cNvSpPr txBox="1"/>
+          <p:nvPr/>
+        </p:nvSpPr>
+        <p:spPr>
+          <a:xfrm>
+            <a:off x="411480" y="5495544"/>
+            <a:ext cx="11368735" cy="502920"/>
+          </a:xfrm>
+          <a:prstGeom prst="rect">
+            <a:avLst/>
+          </a:prstGeom>
+          <a:noFill/>
+        </p:spPr>
+        <p:txBody>
+          <a:bodyPr wrap="square" anchor="t">
+            <a:spAutoFit/>
+          </a:bodyPr>
+          <a:lstStyle/>
+          <a:p>
+            <a:pPr algn="l">
+              <a:defRPr sz="800">
+                <a:latin typeface="Menlo"/>
+              </a:defRPr>
+            </a:pPr>
+            <a:r>
+              <a:t>python tenure/scripts/tenure_basic_plots.py --mode pd29 --only decision_asst_time</a:t>
+            </a:r>
+          </a:p>
+        </p:txBody>
+      </p:sp>
+      <p:sp>
+        <p:nvSpPr>
+          <p:cNvPr id="6" name="TextBox 5"/>
+          <p:cNvSpPr txBox="1"/>
+          <p:nvPr/>
+        </p:nvSpPr>
+        <p:spPr>
+          <a:xfrm>
+            <a:off x="411480" y="6035040"/>
+            <a:ext cx="11368735" cy="384048"/>
+          </a:xfrm>
+          <a:prstGeom prst="rect">
+            <a:avLst/>
+          </a:prstGeom>
+          <a:noFill/>
+        </p:spPr>
+        <p:txBody>
+          <a:bodyPr wrap="square">
+            <a:spAutoFit/>
+          </a:bodyPr>
+          <a:lstStyle/>
+          <a:p>
+            <a:pPr>
+              <a:defRPr sz="1000"/>
+            </a:pPr>
+            <a:r>
+              <a:t>resolved=391 · in reference band=63</a:t>
+            </a:r>
+          </a:p>
+        </p:txBody>
+      </p:sp>
+    </p:spTree>
+  </p:cSld>
+  <p:clrMapOvr>
+    <a:masterClrMapping/>
+  </p:clrMapOvr>
+</p:sld>
+</file>
+
+<file path=ppt/slides/slide12.xml><?xml version="1.0" encoding="utf-8"?>
+<p:sld xmlns:a="http://schemas.openxmlformats.org/drawingml/2006/main" xmlns:p="http://schemas.openxmlformats.org/presentationml/2006/main" xmlns:r="http://schemas.openxmlformats.org/officeDocument/2006/relationships">
+  <p:cSld>
+    <p:spTree>
+      <p:nvGrpSpPr>
+        <p:cNvPr id="1" name=""/>
+        <p:cNvGrpSpPr/>
+        <p:nvPr/>
+      </p:nvGrpSpPr>
+      <p:grpSpPr/>
+      <p:sp>
+        <p:nvSpPr>
+          <p:cNvPr id="2" name="TextBox 1"/>
+          <p:cNvSpPr txBox="1"/>
+          <p:nvPr/>
+        </p:nvSpPr>
+        <p:spPr>
+          <a:xfrm>
+            <a:off x="411480" y="201168"/>
+            <a:ext cx="11368735" cy="502920"/>
+          </a:xfrm>
+          <a:prstGeom prst="rect">
+            <a:avLst/>
+          </a:prstGeom>
+          <a:noFill/>
+        </p:spPr>
+        <p:txBody>
+          <a:bodyPr wrap="square">
+            <a:spAutoFit/>
+          </a:bodyPr>
+          <a:lstStyle/>
+          <a:p>
+            <a:pPr>
+              <a:defRPr b="1" sz="2000"/>
+            </a:pPr>
+            <a:r>
+              <a:t>Slide 10 — Own career pubs rate at decision (Alex Â)</a:t>
+            </a:r>
+          </a:p>
+          <a:p>
+            <a:pPr>
+              <a:defRPr sz="1200" i="1"/>
+            </a:pPr>
+            <a:r>
+              <a:t>DECISION · cum ÷ career age · ability slice</a:t>
+            </a:r>
+          </a:p>
+        </p:txBody>
+      </p:sp>
+      <p:sp>
+        <p:nvSpPr>
+          <p:cNvPr id="3" name="TextBox 2"/>
+          <p:cNvSpPr txBox="1"/>
+          <p:nvPr/>
+        </p:nvSpPr>
+        <p:spPr>
+          <a:xfrm>
+            <a:off x="411480" y="777240"/>
+            <a:ext cx="11368735" cy="713232"/>
+          </a:xfrm>
+          <a:prstGeom prst="rect">
+            <a:avLst/>
+          </a:prstGeom>
+          <a:noFill/>
+        </p:spPr>
+        <p:txBody>
+          <a:bodyPr wrap="square">
+            <a:spAutoFit/>
+          </a:bodyPr>
+          <a:lstStyle/>
+          <a:p>
+            <a:pPr>
+              <a:spcAft>
+                <a:spcPts val="200"/>
+              </a:spcAft>
+              <a:defRPr sz="1100"/>
+            </a:pPr>
+            <a:r>
+              <a:t>• pubs_per_career_year from career master at decision calendar year.</a:t>
+            </a:r>
+          </a:p>
+          <a:p>
+            <a:pPr>
+              <a:spcAft>
+                <a:spcPts val="200"/>
+              </a:spcAft>
+              <a:defRPr sz="1100"/>
+            </a:pPr>
+            <a:r>
+              <a:t>• 280/391 with computable rate (OpenAlex coverage gap).</a:t>
+            </a:r>
+          </a:p>
+          <a:p>
+            <a:pPr>
+              <a:spcAft>
+                <a:spcPts val="200"/>
+              </a:spcAft>
+              <a:defRPr sz="1100"/>
+            </a:pPr>
+            <a:r>
+              <a:t>• Pairs with own-career HERO slide — not the peer-context X.</a:t>
+            </a:r>
+          </a:p>
+        </p:txBody>
+      </p:sp>
+      <p:pic>
+        <p:nvPicPr>
+          <p:cNvPr id="4" name="Picture 3" descr="TENURE_pubs_career_rate_pd29.png"/>
+          <p:cNvPicPr>
+            <a:picLocks noChangeAspect="1"/>
+          </p:cNvPicPr>
+          <p:nvPr/>
+        </p:nvPicPr>
+        <p:blipFill>
+          <a:blip r:embed="rId2"/>
+          <a:stretch>
+            <a:fillRect/>
+          </a:stretch>
+        </p:blipFill>
+        <p:spPr>
+          <a:xfrm>
+            <a:off x="2967227" y="1545336"/>
+            <a:ext cx="6257240" cy="3877056"/>
+          </a:xfrm>
+          <a:prstGeom prst="rect">
+            <a:avLst/>
+          </a:prstGeom>
+        </p:spPr>
+      </p:pic>
+      <p:sp>
+        <p:nvSpPr>
+          <p:cNvPr id="5" name="TextBox 4"/>
+          <p:cNvSpPr txBox="1"/>
+          <p:nvPr/>
+        </p:nvSpPr>
+        <p:spPr>
+          <a:xfrm>
+            <a:off x="411480" y="5495544"/>
+            <a:ext cx="11368735" cy="502920"/>
+          </a:xfrm>
+          <a:prstGeom prst="rect">
+            <a:avLst/>
+          </a:prstGeom>
+          <a:noFill/>
+        </p:spPr>
+        <p:txBody>
+          <a:bodyPr wrap="square" anchor="t">
+            <a:spAutoFit/>
+          </a:bodyPr>
+          <a:lstStyle/>
+          <a:p>
+            <a:pPr algn="l">
+              <a:defRPr sz="800">
+                <a:latin typeface="Menlo"/>
+              </a:defRPr>
+            </a:pPr>
+            <a:r>
+              <a:t>python tenure/scripts/tenure_basic_plots.py --mode pd29 --only career_rate</a:t>
+            </a:r>
+          </a:p>
+        </p:txBody>
+      </p:sp>
+      <p:sp>
+        <p:nvSpPr>
+          <p:cNvPr id="6" name="TextBox 5"/>
+          <p:cNvSpPr txBox="1"/>
+          <p:nvPr/>
+        </p:nvSpPr>
+        <p:spPr>
+          <a:xfrm>
+            <a:off x="411480" y="6035040"/>
+            <a:ext cx="11368735" cy="384048"/>
+          </a:xfrm>
+          <a:prstGeom prst="rect">
+            <a:avLst/>
+          </a:prstGeom>
+          <a:noFill/>
+        </p:spPr>
+        <p:txBody>
+          <a:bodyPr wrap="square">
+            <a:spAutoFit/>
+          </a:bodyPr>
+          <a:lstStyle/>
+          <a:p>
+            <a:pPr>
+              <a:defRPr sz="1000"/>
+            </a:pPr>
+            <a:r>
+              <a:t>n=280 · median=3.65 · mean=4.83 · sd=5.51</a:t>
+            </a:r>
+          </a:p>
+        </p:txBody>
+      </p:sp>
+    </p:spTree>
+  </p:cSld>
+  <p:clrMapOvr>
+    <a:masterClrMapping/>
+  </p:clrMapOvr>
+</p:sld>
+</file>
+
+<file path=ppt/slides/slide13.xml><?xml version="1.0" encoding="utf-8"?>
+<p:sld xmlns:a="http://schemas.openxmlformats.org/drawingml/2006/main" xmlns:p="http://schemas.openxmlformats.org/presentationml/2006/main" xmlns:r="http://schemas.openxmlformats.org/officeDocument/2006/relationships">
+  <p:cSld>
+    <p:spTree>
+      <p:nvGrpSpPr>
+        <p:cNvPr id="1" name=""/>
+        <p:cNvGrpSpPr/>
+        <p:nvPr/>
+      </p:nvGrpSpPr>
+      <p:grpSpPr/>
+      <p:sp>
+        <p:nvSpPr>
+          <p:cNvPr id="2" name="TextBox 1"/>
+          <p:cNvSpPr txBox="1"/>
+          <p:nvPr/>
+        </p:nvSpPr>
+        <p:spPr>
+          <a:xfrm>
+            <a:off x="411480" y="201168"/>
+            <a:ext cx="11368735" cy="502920"/>
+          </a:xfrm>
+          <a:prstGeom prst="rect">
+            <a:avLst/>
+          </a:prstGeom>
+          <a:noFill/>
+        </p:spPr>
+        <p:txBody>
+          <a:bodyPr wrap="square">
+            <a:spAutoFit/>
+          </a:bodyPr>
+          <a:lstStyle/>
+          <a:p>
+            <a:pPr>
+              <a:defRPr b="1" sz="2000"/>
+            </a:pPr>
+            <a:r>
+              <a:t>Slide 11 — Own career pubs rate by outcome</a:t>
+            </a:r>
+          </a:p>
+          <a:p>
+            <a:pPr>
+              <a:defRPr sz="1200" i="1"/>
+            </a:pPr>
+            <a:r>
+              <a:t>DECISION · Tenured vs attrition · ability slice</a:t>
+            </a:r>
+          </a:p>
+        </p:txBody>
+      </p:sp>
+      <p:sp>
+        <p:nvSpPr>
+          <p:cNvPr id="3" name="TextBox 2"/>
+          <p:cNvSpPr txBox="1"/>
+          <p:nvPr/>
+        </p:nvSpPr>
+        <p:spPr>
+          <a:xfrm>
+            <a:off x="411480" y="777240"/>
+            <a:ext cx="11368735" cy="713232"/>
+          </a:xfrm>
+          <a:prstGeom prst="rect">
+            <a:avLst/>
+          </a:prstGeom>
+          <a:noFill/>
+        </p:spPr>
+        <p:txBody>
+          <a:bodyPr wrap="square">
+            <a:spAutoFit/>
+          </a:bodyPr>
+          <a:lstStyle/>
+          <a:p>
+            <a:pPr>
+              <a:spcAft>
+                <a:spcPts val="200"/>
+              </a:spcAft>
+              <a:defRPr sz="1100"/>
+            </a:pPr>
+            <a:r>
+              <a:t>• Same career-rate metric split by tenure vs attrition (incl. OTT).</a:t>
+            </a:r>
+          </a:p>
+          <a:p>
+            <a:pPr>
+              <a:spcAft>
+                <a:spcPts val="200"/>
+              </a:spcAft>
+              <a:defRPr sz="1100"/>
+            </a:pPr>
+            <a:r>
+              <a:t>• Descriptive marginals — HERO bins on dept pond LOO, not own Â.</a:t>
+            </a:r>
+          </a:p>
+        </p:txBody>
+      </p:sp>
+      <p:pic>
+        <p:nvPicPr>
+          <p:cNvPr id="4" name="Picture 3" descr="TENURE_pubs_career_rate_by_outcome_pd29.png"/>
+          <p:cNvPicPr>
+            <a:picLocks noChangeAspect="1"/>
+          </p:cNvPicPr>
+          <p:nvPr/>
+        </p:nvPicPr>
+        <p:blipFill>
+          <a:blip r:embed="rId2"/>
+          <a:stretch>
+            <a:fillRect/>
+          </a:stretch>
+        </p:blipFill>
+        <p:spPr>
+          <a:xfrm>
+            <a:off x="2932854" y="1545336"/>
+            <a:ext cx="6325987" cy="3877056"/>
+          </a:xfrm>
+          <a:prstGeom prst="rect">
+            <a:avLst/>
+          </a:prstGeom>
+        </p:spPr>
+      </p:pic>
+      <p:sp>
+        <p:nvSpPr>
+          <p:cNvPr id="5" name="TextBox 4"/>
+          <p:cNvSpPr txBox="1"/>
+          <p:nvPr/>
+        </p:nvSpPr>
+        <p:spPr>
+          <a:xfrm>
+            <a:off x="411480" y="5495544"/>
+            <a:ext cx="11368735" cy="502920"/>
+          </a:xfrm>
+          <a:prstGeom prst="rect">
+            <a:avLst/>
+          </a:prstGeom>
+          <a:noFill/>
+        </p:spPr>
+        <p:txBody>
+          <a:bodyPr wrap="square" anchor="t">
+            <a:spAutoFit/>
+          </a:bodyPr>
+          <a:lstStyle/>
+          <a:p>
+            <a:pPr algn="l">
+              <a:defRPr sz="800">
+                <a:latin typeface="Menlo"/>
+              </a:defRPr>
+            </a:pPr>
+            <a:r>
+              <a:t>python tenure/scripts/tenure_basic_plots.py --mode pd29 --only career_rate_by_outcome</a:t>
+            </a:r>
+          </a:p>
+        </p:txBody>
+      </p:sp>
+      <p:sp>
+        <p:nvSpPr>
+          <p:cNvPr id="6" name="TextBox 5"/>
+          <p:cNvSpPr txBox="1"/>
+          <p:nvPr/>
+        </p:nvSpPr>
+        <p:spPr>
+          <a:xfrm>
+            <a:off x="411480" y="6035040"/>
+            <a:ext cx="11368735" cy="384048"/>
+          </a:xfrm>
+          <a:prstGeom prst="rect">
+            <a:avLst/>
+          </a:prstGeom>
+          <a:noFill/>
+        </p:spPr>
+        <p:txBody>
+          <a:bodyPr wrap="square">
+            <a:spAutoFit/>
+          </a:bodyPr>
+          <a:lstStyle/>
+          <a:p>
+            <a:pPr>
+              <a:defRPr sz="1000"/>
+            </a:pPr>
+            <a:r>
+              <a:t>tenured n=146 med=4.4 · attrition n=134 med=3.0</a:t>
+            </a:r>
+          </a:p>
+        </p:txBody>
+      </p:sp>
+    </p:spTree>
+  </p:cSld>
+  <p:clrMapOvr>
+    <a:masterClrMapping/>
+  </p:clrMapOvr>
+</p:sld>
+</file>
+
+<file path=ppt/slides/slide14.xml><?xml version="1.0" encoding="utf-8"?>
+<p:sld xmlns:a="http://schemas.openxmlformats.org/drawingml/2006/main" xmlns:p="http://schemas.openxmlformats.org/presentationml/2006/main" xmlns:r="http://schemas.openxmlformats.org/officeDocument/2006/relationships">
+  <p:cSld>
+    <p:spTree>
+      <p:nvGrpSpPr>
+        <p:cNvPr id="1" name=""/>
+        <p:cNvGrpSpPr/>
+        <p:nvPr/>
+      </p:nvGrpSpPr>
+      <p:grpSpPr/>
+      <p:sp>
+        <p:nvSpPr>
+          <p:cNvPr id="2" name="TextBox 1"/>
+          <p:cNvSpPr txBox="1"/>
+          <p:nvPr/>
+        </p:nvSpPr>
+        <p:spPr>
+          <a:xfrm>
+            <a:off x="411480" y="201168"/>
+            <a:ext cx="11368735" cy="502920"/>
+          </a:xfrm>
+          <a:prstGeom prst="rect">
+            <a:avLst/>
+          </a:prstGeom>
+          <a:noFill/>
+        </p:spPr>
+        <p:txBody>
+          <a:bodyPr wrap="square">
+            <a:spAutoFit/>
+          </a:bodyPr>
+          <a:lstStyle/>
+          <a:p>
+            <a:pPr>
+              <a:defRPr b="1" sz="2000"/>
+            </a:pPr>
+            <a:r>
+              <a:t>Slide 12 — Dept pond LOO career rate</a:t>
+            </a:r>
+          </a:p>
+          <a:p>
+            <a:pPr>
+              <a:defRPr sz="1200" i="1"/>
+            </a:pPr>
+            <a:r>
+              <a:t>DECISION · Whole dept at decision year · HERO peer-context X</a:t>
+            </a:r>
+          </a:p>
+        </p:txBody>
+      </p:sp>
+      <p:sp>
+        <p:nvSpPr>
+          <p:cNvPr id="3" name="TextBox 2"/>
+          <p:cNvSpPr txBox="1"/>
+          <p:nvPr/>
+        </p:nvSpPr>
+        <p:spPr>
+          <a:xfrm>
+            <a:off x="411480" y="777240"/>
+            <a:ext cx="11368735" cy="713232"/>
+          </a:xfrm>
+          <a:prstGeom prst="rect">
+            <a:avLst/>
+          </a:prstGeom>
+          <a:noFill/>
+        </p:spPr>
+        <p:txBody>
+          <a:bodyPr wrap="square">
+            <a:spAutoFit/>
+          </a:bodyPr>
+          <a:lstStyle/>
+          <a:p>
+            <a:pPr>
+              <a:spcAft>
+                <a:spcPts val="200"/>
+              </a:spcAft>
+              <a:defRPr sz="1100"/>
+            </a:pPr>
+            <a:r>
+              <a:t>• LOO mean of all other faculty's pubs_per_career_year in department.</a:t>
+            </a:r>
+          </a:p>
+          <a:p>
+            <a:pPr>
+              <a:spcAft>
+                <a:spcPts val="200"/>
+              </a:spcAft>
+              <a:defRPr sz="1100"/>
+            </a:pPr>
+            <a:r>
+              <a:t>• 389/391 with computable dept LOO — primary HERO x-axis.</a:t>
+            </a:r>
+          </a:p>
+          <a:p>
+            <a:pPr>
+              <a:spcAft>
+                <a:spcPts val="200"/>
+              </a:spcAft>
+              <a:defRPr sz="1100"/>
+            </a:pPr>
+            <a:r>
+              <a:t>• Includes senior faculty, not assistant-only uni×year pool.</a:t>
+            </a:r>
+          </a:p>
+        </p:txBody>
+      </p:sp>
+      <p:pic>
+        <p:nvPicPr>
+          <p:cNvPr id="4" name="Picture 3" descr="TENURE_dept_loo_career_rate_pd29.png"/>
+          <p:cNvPicPr>
+            <a:picLocks noChangeAspect="1"/>
+          </p:cNvPicPr>
+          <p:nvPr/>
+        </p:nvPicPr>
+        <p:blipFill>
+          <a:blip r:embed="rId2"/>
+          <a:stretch>
+            <a:fillRect/>
+          </a:stretch>
+        </p:blipFill>
+        <p:spPr>
+          <a:xfrm>
+            <a:off x="2967227" y="1545336"/>
+            <a:ext cx="6257240" cy="3877056"/>
+          </a:xfrm>
+          <a:prstGeom prst="rect">
+            <a:avLst/>
+          </a:prstGeom>
+        </p:spPr>
+      </p:pic>
+      <p:sp>
+        <p:nvSpPr>
+          <p:cNvPr id="5" name="TextBox 4"/>
+          <p:cNvSpPr txBox="1"/>
+          <p:nvPr/>
+        </p:nvSpPr>
+        <p:spPr>
+          <a:xfrm>
+            <a:off x="411480" y="5495544"/>
+            <a:ext cx="11368735" cy="502920"/>
+          </a:xfrm>
+          <a:prstGeom prst="rect">
+            <a:avLst/>
+          </a:prstGeom>
+          <a:noFill/>
+        </p:spPr>
+        <p:txBody>
+          <a:bodyPr wrap="square" anchor="t">
+            <a:spAutoFit/>
+          </a:bodyPr>
+          <a:lstStyle/>
+          <a:p>
+            <a:pPr algn="l">
+              <a:defRPr sz="800">
+                <a:latin typeface="Menlo"/>
+              </a:defRPr>
+            </a:pPr>
+            <a:r>
+              <a:t>python tenure/scripts/tenure_basic_plots.py --mode pd29 --only dept_loo</a:t>
+            </a:r>
+          </a:p>
+        </p:txBody>
+      </p:sp>
+      <p:sp>
+        <p:nvSpPr>
+          <p:cNvPr id="6" name="TextBox 5"/>
+          <p:cNvSpPr txBox="1"/>
+          <p:nvPr/>
+        </p:nvSpPr>
+        <p:spPr>
+          <a:xfrm>
+            <a:off x="411480" y="6035040"/>
+            <a:ext cx="11368735" cy="384048"/>
+          </a:xfrm>
+          <a:prstGeom prst="rect">
+            <a:avLst/>
+          </a:prstGeom>
+          <a:noFill/>
+        </p:spPr>
+        <p:txBody>
+          <a:bodyPr wrap="square">
+            <a:spAutoFit/>
+          </a:bodyPr>
+          <a:lstStyle/>
+          <a:p>
+            <a:pPr>
+              <a:defRPr sz="1000"/>
+            </a:pPr>
+            <a:r>
+              <a:t>n=389 · med=4.69 · mean=4.76</a:t>
+            </a:r>
+          </a:p>
+        </p:txBody>
+      </p:sp>
+    </p:spTree>
+  </p:cSld>
+  <p:clrMapOvr>
+    <a:masterClrMapping/>
+  </p:clrMapOvr>
+</p:sld>
+</file>
+
+<file path=ppt/slides/slide15.xml><?xml version="1.0" encoding="utf-8"?>
+<p:sld xmlns:a="http://schemas.openxmlformats.org/drawingml/2006/main" xmlns:p="http://schemas.openxmlformats.org/presentationml/2006/main" xmlns:r="http://schemas.openxmlformats.org/officeDocument/2006/relationships">
+  <p:cSld>
+    <p:spTree>
+      <p:nvGrpSpPr>
+        <p:cNvPr id="1" name=""/>
+        <p:cNvGrpSpPr/>
+        <p:nvPr/>
+      </p:nvGrpSpPr>
+      <p:grpSpPr/>
+      <p:sp>
+        <p:nvSpPr>
+          <p:cNvPr id="2" name="TextBox 1"/>
+          <p:cNvSpPr txBox="1"/>
+          <p:nvPr/>
+        </p:nvSpPr>
+        <p:spPr>
+          <a:xfrm>
+            <a:off x="411480" y="201168"/>
+            <a:ext cx="11368735" cy="502920"/>
+          </a:xfrm>
+          <a:prstGeom prst="rect">
+            <a:avLst/>
+          </a:prstGeom>
+          <a:noFill/>
+        </p:spPr>
+        <p:txBody>
+          <a:bodyPr wrap="square">
+            <a:spAutoFit/>
+          </a:bodyPr>
+          <a:lstStyle/>
+          <a:p>
+            <a:pPr>
+              <a:defRPr b="1" sz="2000"/>
+            </a:pPr>
+            <a:r>
+              <a:t>Slide 13 — Dept pond LOO by outcome</a:t>
+            </a:r>
+          </a:p>
+          <a:p>
+            <a:pPr>
+              <a:defRPr sz="1200" i="1"/>
+            </a:pPr>
+            <a:r>
+              <a:t>DECISION · Peer environment split · complements decision HERO</a:t>
+            </a:r>
+          </a:p>
+        </p:txBody>
+      </p:sp>
+      <p:sp>
+        <p:nvSpPr>
+          <p:cNvPr id="3" name="TextBox 2"/>
+          <p:cNvSpPr txBox="1"/>
+          <p:nvPr/>
+        </p:nvSpPr>
+        <p:spPr>
+          <a:xfrm>
+            <a:off x="411480" y="777240"/>
+            <a:ext cx="11368735" cy="713232"/>
+          </a:xfrm>
+          <a:prstGeom prst="rect">
+            <a:avLst/>
+          </a:prstGeom>
+          <a:noFill/>
+        </p:spPr>
+        <p:txBody>
+          <a:bodyPr wrap="square">
+            <a:spAutoFit/>
+          </a:bodyPr>
+          <a:lstStyle/>
+          <a:p>
+            <a:pPr>
+              <a:spcAft>
+                <a:spcPts val="200"/>
+              </a:spcAft>
+              <a:defRPr sz="1100"/>
+            </a:pPr>
+            <a:r>
+              <a:t>• Marginal dept LOO by tenure vs attrition — not binned rates.</a:t>
+            </a:r>
+          </a:p>
+          <a:p>
+            <a:pPr>
+              <a:spcAft>
+                <a:spcPts val="200"/>
+              </a:spcAft>
+              <a:defRPr sz="1100"/>
+            </a:pPr>
+            <a:r>
+              <a:t>• Ask: did promoted faculty sit in stronger department ponds on average?</a:t>
+            </a:r>
+          </a:p>
+        </p:txBody>
+      </p:sp>
+      <p:pic>
+        <p:nvPicPr>
+          <p:cNvPr id="4" name="Picture 3" descr="TENURE_dept_loo_career_rate_by_outcome_pd29.png"/>
+          <p:cNvPicPr>
+            <a:picLocks noChangeAspect="1"/>
+          </p:cNvPicPr>
+          <p:nvPr/>
+        </p:nvPicPr>
+        <p:blipFill>
+          <a:blip r:embed="rId2"/>
+          <a:stretch>
+            <a:fillRect/>
+          </a:stretch>
+        </p:blipFill>
+        <p:spPr>
+          <a:xfrm>
+            <a:off x="2932854" y="1545336"/>
+            <a:ext cx="6325987" cy="3877056"/>
+          </a:xfrm>
+          <a:prstGeom prst="rect">
+            <a:avLst/>
+          </a:prstGeom>
+        </p:spPr>
+      </p:pic>
+      <p:sp>
+        <p:nvSpPr>
+          <p:cNvPr id="5" name="TextBox 4"/>
+          <p:cNvSpPr txBox="1"/>
+          <p:nvPr/>
+        </p:nvSpPr>
+        <p:spPr>
+          <a:xfrm>
+            <a:off x="411480" y="5495544"/>
+            <a:ext cx="11368735" cy="502920"/>
+          </a:xfrm>
+          <a:prstGeom prst="rect">
+            <a:avLst/>
+          </a:prstGeom>
+          <a:noFill/>
+        </p:spPr>
+        <p:txBody>
+          <a:bodyPr wrap="square" anchor="t">
+            <a:spAutoFit/>
+          </a:bodyPr>
+          <a:lstStyle/>
+          <a:p>
+            <a:pPr algn="l">
+              <a:defRPr sz="800">
+                <a:latin typeface="Menlo"/>
+              </a:defRPr>
+            </a:pPr>
+            <a:r>
+              <a:t>python tenure/scripts/tenure_basic_plots.py --mode pd29 --only dept_loo_by_outcome</a:t>
+            </a:r>
+          </a:p>
+        </p:txBody>
+      </p:sp>
+      <p:sp>
+        <p:nvSpPr>
+          <p:cNvPr id="6" name="TextBox 5"/>
+          <p:cNvSpPr txBox="1"/>
+          <p:nvPr/>
+        </p:nvSpPr>
+        <p:spPr>
+          <a:xfrm>
+            <a:off x="411480" y="6035040"/>
+            <a:ext cx="11368735" cy="384048"/>
+          </a:xfrm>
+          <a:prstGeom prst="rect">
+            <a:avLst/>
+          </a:prstGeom>
+          <a:noFill/>
+        </p:spPr>
+        <p:txBody>
+          <a:bodyPr wrap="square">
+            <a:spAutoFit/>
+          </a:bodyPr>
+          <a:lstStyle/>
+          <a:p>
+            <a:pPr>
+              <a:defRPr sz="1000"/>
+            </a:pPr>
+            <a:r>
+              <a:t>tenured n=191 med=4.7 · attrition n=198 med=4.8</a:t>
+            </a:r>
+          </a:p>
+        </p:txBody>
+      </p:sp>
+    </p:spTree>
+  </p:cSld>
+  <p:clrMapOvr>
+    <a:masterClrMapping/>
+  </p:clrMapOvr>
+</p:sld>
+</file>
+
+<file path=ppt/slides/slide16.xml><?xml version="1.0" encoding="utf-8"?>
+<p:sld xmlns:a="http://schemas.openxmlformats.org/drawingml/2006/main" xmlns:p="http://schemas.openxmlformats.org/presentationml/2006/main" xmlns:r="http://schemas.openxmlformats.org/officeDocument/2006/relationships">
+  <p:cSld>
+    <p:spTree>
+      <p:nvGrpSpPr>
+        <p:cNvPr id="1" name=""/>
+        <p:cNvGrpSpPr/>
+        <p:nvPr/>
+      </p:nvGrpSpPr>
+      <p:grpSpPr/>
+      <p:sp>
+        <p:nvSpPr>
+          <p:cNvPr id="2" name="TextBox 1"/>
+          <p:cNvSpPr txBox="1"/>
+          <p:nvPr/>
+        </p:nvSpPr>
+        <p:spPr>
+          <a:xfrm>
+            <a:off x="411480" y="201168"/>
+            <a:ext cx="11368735" cy="502920"/>
+          </a:xfrm>
+          <a:prstGeom prst="rect">
+            <a:avLst/>
+          </a:prstGeom>
+          <a:noFill/>
+        </p:spPr>
+        <p:txBody>
+          <a:bodyPr wrap="square">
+            <a:spAutoFit/>
+          </a:bodyPr>
+          <a:lstStyle/>
+          <a:p>
+            <a:pPr>
+              <a:defRPr b="1" sz="2000"/>
+            </a:pPr>
+            <a:r>
+              <a:t>Slide 14 — Zero annual pubs but positive career rate (tenured)</a:t>
+            </a:r>
+          </a:p>
+          <a:p>
+            <a:pPr>
+              <a:defRPr sz="1200" i="1"/>
+            </a:pPr>
+            <a:r>
+              <a:t>DECISION · Wrong lens if you use pubs_year only</a:t>
+            </a:r>
+          </a:p>
+        </p:txBody>
+      </p:sp>
+      <p:sp>
+        <p:nvSpPr>
+          <p:cNvPr id="3" name="TextBox 2"/>
+          <p:cNvSpPr txBox="1"/>
+          <p:nvPr/>
+        </p:nvSpPr>
+        <p:spPr>
+          <a:xfrm>
+            <a:off x="411480" y="777240"/>
+            <a:ext cx="11368735" cy="713232"/>
+          </a:xfrm>
+          <a:prstGeom prst="rect">
+            <a:avLst/>
+          </a:prstGeom>
+          <a:noFill/>
+        </p:spPr>
+        <p:txBody>
+          <a:bodyPr wrap="square">
+            <a:spAutoFit/>
+          </a:bodyPr>
+          <a:lstStyle/>
+          <a:p>
+            <a:pPr>
+              <a:spcAft>
+                <a:spcPts val="200"/>
+              </a:spcAft>
+              <a:defRPr sz="1100"/>
+            </a:pPr>
+            <a:r>
+              <a:t>• Tenured with pubs_year=0 at decision but pubs_per_career_year &gt; 0.</a:t>
+            </a:r>
+          </a:p>
+          <a:p>
+            <a:pPr>
+              <a:spcAft>
+                <a:spcPts val="200"/>
+              </a:spcAft>
+              <a:defRPr sz="1100"/>
+            </a:pPr>
+            <a:r>
+              <a:t>• Motivates cumulative / career-rate lock vs single-year annual count.</a:t>
+            </a:r>
+          </a:p>
+        </p:txBody>
+      </p:sp>
+      <p:pic>
+        <p:nvPicPr>
+          <p:cNvPr id="4" name="Picture 3" descr="TENURE_annual_zero_tenured_pd29.png"/>
+          <p:cNvPicPr>
+            <a:picLocks noChangeAspect="1"/>
+          </p:cNvPicPr>
+          <p:nvPr/>
+        </p:nvPicPr>
+        <p:blipFill>
+          <a:blip r:embed="rId2"/>
+          <a:stretch>
+            <a:fillRect/>
+          </a:stretch>
+        </p:blipFill>
+        <p:spPr>
+          <a:xfrm>
+            <a:off x="2831578" y="1545336"/>
+            <a:ext cx="6528538" cy="3877056"/>
+          </a:xfrm>
+          <a:prstGeom prst="rect">
+            <a:avLst/>
+          </a:prstGeom>
+        </p:spPr>
+      </p:pic>
+      <p:sp>
+        <p:nvSpPr>
+          <p:cNvPr id="5" name="TextBox 4"/>
+          <p:cNvSpPr txBox="1"/>
+          <p:nvPr/>
+        </p:nvSpPr>
+        <p:spPr>
+          <a:xfrm>
+            <a:off x="411480" y="5495544"/>
+            <a:ext cx="11368735" cy="502920"/>
+          </a:xfrm>
+          <a:prstGeom prst="rect">
+            <a:avLst/>
+          </a:prstGeom>
+          <a:noFill/>
+        </p:spPr>
+        <p:txBody>
+          <a:bodyPr wrap="square" anchor="t">
+            <a:spAutoFit/>
+          </a:bodyPr>
+          <a:lstStyle/>
+          <a:p>
+            <a:pPr algn="l">
+              <a:defRPr sz="800">
+                <a:latin typeface="Menlo"/>
+              </a:defRPr>
+            </a:pPr>
+            <a:r>
+              <a:t>python tenure/scripts/tenure_basic_plots.py --mode pd29 --only annual_zero_tenured</a:t>
+            </a:r>
+          </a:p>
+        </p:txBody>
+      </p:sp>
+      <p:sp>
+        <p:nvSpPr>
+          <p:cNvPr id="6" name="TextBox 5"/>
+          <p:cNvSpPr txBox="1"/>
+          <p:nvPr/>
+        </p:nvSpPr>
+        <p:spPr>
+          <a:xfrm>
+            <a:off x="411480" y="6035040"/>
+            <a:ext cx="11368735" cy="384048"/>
+          </a:xfrm>
+          <a:prstGeom prst="rect">
+            <a:avLst/>
+          </a:prstGeom>
+          <a:noFill/>
+        </p:spPr>
+        <p:txBody>
+          <a:bodyPr wrap="square">
+            <a:spAutoFit/>
+          </a:bodyPr>
+          <a:lstStyle/>
+          <a:p>
+            <a:pPr>
+              <a:defRPr sz="1000"/>
+            </a:pPr>
+            <a:r>
+              <a:t>tenured=191 · zero annual / +career=6 (3.14%)</a:t>
             </a:r>
           </a:p>
         </p:txBody>
@@ -3280,7 +4584,7 @@
               <a:defRPr sz="1200" i="1"/>
             </a:pPr>
             <a:r>
-              <a:t>MBB PD17 / reigning overlap analog · pubs_year z within year</a:t>
+              <a:t>ASST-PS · MBB PD17 / reigning overlap analog · pubs_year z within year</a:t>
             </a:r>
           </a:p>
         </p:txBody>
@@ -3424,7 +4728,7 @@
               <a:defRPr sz="1000"/>
             </a:pPr>
             <a:r>
-              <a:t>uni-year pools=283 · asst-years=2,396 · max coverage=245 · H_sort=0.173</a:t>
+              <a:t>uni-year pools=283 · asst-years=2,373 · max coverage=243 · H_sort=0.174</a:t>
             </a:r>
           </a:p>
         </p:txBody>
@@ -3481,7 +4785,7 @@
               <a:defRPr sz="1200" i="1"/>
             </a:pPr>
             <a:r>
-              <a:t>Sensitivity — intensive margin only · compare to prior slide</a:t>
+              <a:t>ASST-PS · Sensitivity — intensive margin only · compare to prior slide</a:t>
             </a:r>
           </a:p>
         </p:txBody>
@@ -3625,7 +4929,7 @@
               <a:defRPr sz="1000"/>
             </a:pPr>
             <a:r>
-              <a:t>uni-year pools=263 · asst-years=1,544 · max coverage=208 · H_sort=0.204</a:t>
+              <a:t>uni-year pools=263 · asst-years=1,526 · max coverage=205 · H_sort=0.207</a:t>
             </a:r>
           </a:p>
         </p:txBody>
@@ -3682,7 +4986,7 @@
               <a:defRPr sz="1200" i="1"/>
             </a:pPr>
             <a:r>
-              <a:t>Person-level mean · N≈796 matches Q16/Q20 HERO</a:t>
+              <a:t>ASST-PS · Person-level mean · N≈796 matches Q16/Q20 HERO</a:t>
             </a:r>
           </a:p>
         </p:txBody>
@@ -3815,7 +5119,7 @@
               <a:defRPr sz="1000"/>
             </a:pPr>
             <a:r>
-              <a:t>n=796 · median=3.35 · mean=4.24 · sd=3.16</a:t>
+              <a:t>n=787 · median=3.34 · mean=4.22 · sd=3.16</a:t>
             </a:r>
           </a:p>
         </p:txBody>
@@ -3872,7 +5176,7 @@
               <a:defRPr sz="1200" i="1"/>
             </a:pPr>
             <a:r>
-              <a:t>Unconditional + inset (pubs &gt; 0) · inference panel</a:t>
+              <a:t>ASST-PS · Unconditional + inset (pubs &gt; 0) · inference panel</a:t>
             </a:r>
           </a:p>
         </p:txBody>
@@ -4016,7 +5320,7 @@
               <a:defRPr sz="1000"/>
             </a:pPr>
             <a:r>
-              <a:t>all n=2,396 (36% zero) · inset n=1,544 · med=7.0 · mean=9.7</a:t>
+              <a:t>all n=2,373 (36% zero) · inset n=1,526 · med=7.0 · mean=9.7</a:t>
             </a:r>
           </a:p>
         </p:txBody>
@@ -4073,7 +5377,7 @@
               <a:defRPr sz="1200" i="1"/>
             </a:pPr>
             <a:r>
-              <a:t>pool_size_oa_loo on assistant person-years</a:t>
+              <a:t>ASST-PS · pool_size_oa_loo on assistant person-years</a:t>
             </a:r>
           </a:p>
         </p:txBody>
@@ -4206,7 +5510,7 @@
               <a:defRPr sz="1000"/>
             </a:pPr>
             <a:r>
-              <a:t>n=2,396 · median=15.00 · mean=17.22 · sd=10.32</a:t>
+              <a:t>n=2,373 · median=15.00 · mean=17.12 · sd=10.36</a:t>
             </a:r>
           </a:p>
         </p:txBody>
@@ -4263,7 +5567,7 @@
               <a:defRPr sz="1200" i="1"/>
             </a:pPr>
             <a:r>
-              <a:t>Tenured vs attrition vs censored · same HERO N</a:t>
+              <a:t>ASST-PS · Tenured vs attrition vs censored · same HERO N</a:t>
             </a:r>
           </a:p>
         </p:txBody>
@@ -4340,8 +5644,8 @@
         </p:blipFill>
         <p:spPr>
           <a:xfrm>
-            <a:off x="2935368" y="1545336"/>
-            <a:ext cx="6320958" cy="3877056"/>
+            <a:off x="2932854" y="1545336"/>
+            <a:ext cx="6325987" cy="3877056"/>
           </a:xfrm>
           <a:prstGeom prst="rect">
             <a:avLst/>
@@ -4407,7 +5711,7 @@
               <a:defRPr sz="1000"/>
             </a:pPr>
             <a:r>
-              <a:t>tenured n=174 med=6.2 · attrition n=202 med=3.0 · censored n=420 med=2.0</a:t>
+              <a:t>tenured n=191 med=6.0 · attrition n=194 med=2.8 · censored n=402 med=1.7</a:t>
             </a:r>
           </a:p>
         </p:txBody>
@@ -4464,7 +5768,7 @@
               <a:defRPr sz="1200" i="1"/>
             </a:pPr>
             <a:r>
-              <a:t>Tenured only · person-level mean + inset (mean &gt; 0)</a:t>
+              <a:t>ASST-PS · Tenured only · person-level mean + inset (mean &gt; 0)</a:t>
             </a:r>
           </a:p>
         </p:txBody>
@@ -4541,8 +5845,8 @@
         </p:blipFill>
         <p:spPr>
           <a:xfrm>
-            <a:off x="2932854" y="1545336"/>
-            <a:ext cx="6325987" cy="3877056"/>
+            <a:off x="2935368" y="1545336"/>
+            <a:ext cx="6320958" cy="3877056"/>
           </a:xfrm>
           <a:prstGeom prst="rect">
             <a:avLst/>
@@ -4608,7 +5912,7 @@
               <a:defRPr sz="1000"/>
             </a:pPr>
             <a:r>
-              <a:t>tenured n=174 · med=6.2 · mean=7.7 · inset n=133</a:t>
+              <a:t>tenured n=191 · med=6.0 · mean=7.7 · inset n=149</a:t>
             </a:r>
           </a:p>
         </p:txBody>
@@ -4665,7 +5969,7 @@
               <a:defRPr sz="1200" i="1"/>
             </a:pPr>
             <a:r>
-              <a:t>Peer environment split · complements HERO x-axis</a:t>
+              <a:t>ASST-PS · Peer environment split · complements HERO x-axis</a:t>
             </a:r>
           </a:p>
         </p:txBody>
@@ -4809,7 +6113,7 @@
               <a:defRPr sz="1000"/>
             </a:pPr>
             <a:r>
-              <a:t>tenured n=174 med=3.8 · attrition n=202 med=3.5 · censored n=420 med=3.2</a:t>
+              <a:t>tenured n=191 med=3.8 · attrition n=194 med=3.7 · censored n=402 med=3.1</a:t>
             </a:r>
           </a:p>
         </p:txBody>
